--- a/classes/parte-4-mlops/202-monitoreo-data-drift-model-drift-alertas/clase-202-monitoreo-data-drift-model-drift-alertas-presentacion.pptx
+++ b/classes/parte-4-mlops/202-monitoreo-data-drift-model-drift-alertas/clase-202-monitoreo-data-drift-model-drift-alertas-presentacion.pptx
@@ -3272,7 +3272,7 @@
                 </a:solidFill>
                 <a:latin typeface="Segoe UI"/>
               </a:rPr>
-              <a:t>Parte: 4 — MLOps · Fuente: Huyen cap. 8 + Evidently AI docs + NannyML + Gama et al., A Survey on Concept Drift Adaptation (ACM, 2014).  Duración estimada: 80 min.</a:t>
+              <a:t>Parte: 4 — MLOps · Fuente: Huyen cap. 8 + Evidently AI docs + NannyML + Gama et al., A Survey on Concept Drift Adaptation (ACM, 2014).  Duración estimada: 80 min. · Nivel: Avanzado</a:t>
             </a:r>
           </a:p>
         </p:txBody>
@@ -3581,7 +3581,7 @@
                 </a:solidFill>
                 <a:latin typeface="Segoe UI"/>
               </a:rPr>
-              <a:t>Parte: 4 — MLOps · Fuente: Huyen cap. 8 + Evidently AI docs + NannyML + Gama et al., A Survey on Concept Drift Adaptation (ACM, 2014).  Duración estimada: 80 min.</a:t>
+              <a:t>Parte: 4 — MLOps · Fuente: Huyen cap. 8 + Evidently AI docs + NannyML + Gama et al., A Survey on Concept Drift Adaptation (ACM, 2014).  Duración estimada: 80 min. · Nivel: Avanzado</a:t>
             </a:r>
           </a:p>
         </p:txBody>
